--- a/presentations/agentic-results-slides.pptx
+++ b/presentations/agentic-results-slides.pptx
@@ -3111,8 +3111,8 @@
         </p:blipFill>
         <p:spPr>
           <a:xfrm>
-            <a:off x="274320" y="154305"/>
-            <a:ext cx="11643359" cy="6549389"/>
+            <a:off x="502920" y="282893"/>
+            <a:ext cx="11186159" cy="6292214"/>
           </a:xfrm>
           <a:prstGeom prst="rect">
             <a:avLst/>
@@ -3153,8 +3153,8 @@
         </p:blipFill>
         <p:spPr>
           <a:xfrm>
-            <a:off x="274320" y="154305"/>
-            <a:ext cx="11643359" cy="6549389"/>
+            <a:off x="502920" y="282893"/>
+            <a:ext cx="11186159" cy="6292214"/>
           </a:xfrm>
           <a:prstGeom prst="rect">
             <a:avLst/>
@@ -3195,8 +3195,8 @@
         </p:blipFill>
         <p:spPr>
           <a:xfrm>
-            <a:off x="274320" y="154305"/>
-            <a:ext cx="11643359" cy="6549389"/>
+            <a:off x="502920" y="282893"/>
+            <a:ext cx="11186159" cy="6292214"/>
           </a:xfrm>
           <a:prstGeom prst="rect">
             <a:avLst/>
@@ -3237,8 +3237,8 @@
         </p:blipFill>
         <p:spPr>
           <a:xfrm>
-            <a:off x="274320" y="154305"/>
-            <a:ext cx="11643359" cy="6549389"/>
+            <a:off x="502920" y="282893"/>
+            <a:ext cx="11186159" cy="6292214"/>
           </a:xfrm>
           <a:prstGeom prst="rect">
             <a:avLst/>
@@ -3279,8 +3279,8 @@
         </p:blipFill>
         <p:spPr>
           <a:xfrm>
-            <a:off x="274320" y="154305"/>
-            <a:ext cx="11643359" cy="6549389"/>
+            <a:off x="502920" y="282893"/>
+            <a:ext cx="11186159" cy="6292214"/>
           </a:xfrm>
           <a:prstGeom prst="rect">
             <a:avLst/>
@@ -3321,8 +3321,8 @@
         </p:blipFill>
         <p:spPr>
           <a:xfrm>
-            <a:off x="274320" y="154305"/>
-            <a:ext cx="11643359" cy="6549389"/>
+            <a:off x="502920" y="282893"/>
+            <a:ext cx="11186159" cy="6292214"/>
           </a:xfrm>
           <a:prstGeom prst="rect">
             <a:avLst/>
@@ -3363,8 +3363,8 @@
         </p:blipFill>
         <p:spPr>
           <a:xfrm>
-            <a:off x="274320" y="154305"/>
-            <a:ext cx="11643359" cy="6549389"/>
+            <a:off x="502920" y="282893"/>
+            <a:ext cx="11186159" cy="6292214"/>
           </a:xfrm>
           <a:prstGeom prst="rect">
             <a:avLst/>
@@ -3405,8 +3405,8 @@
         </p:blipFill>
         <p:spPr>
           <a:xfrm>
-            <a:off x="274320" y="154305"/>
-            <a:ext cx="11643359" cy="6549389"/>
+            <a:off x="502920" y="282893"/>
+            <a:ext cx="11186159" cy="6292214"/>
           </a:xfrm>
           <a:prstGeom prst="rect">
             <a:avLst/>
